--- a/06-final-report/figures/fig-8-ollama-tier.pptx
+++ b/06-final-report/figures/fig-8-ollama-tier.pptx
@@ -193,16 +193,16 @@
                 <c:formatCode>General</c:formatCode>
                 <c:ptCount val="4"/>
                 <c:pt idx="0">
-                  <c:v>232</c:v>
+                  <c:v>432</c:v>
                 </c:pt>
                 <c:pt idx="1">
-                  <c:v>810</c:v>
+                  <c:v>1480</c:v>
                 </c:pt>
                 <c:pt idx="2">
-                  <c:v>1414</c:v>
+                  <c:v>2522</c:v>
                 </c:pt>
                 <c:pt idx="3">
-                  <c:v>2024</c:v>
+                  <c:v>3561</c:v>
                 </c:pt>
               </c:numCache>
             </c:numRef>
@@ -282,16 +282,16 @@
                 <c:formatCode>General</c:formatCode>
                 <c:ptCount val="4"/>
                 <c:pt idx="0">
-                  <c:v>379</c:v>
+                  <c:v>664</c:v>
                 </c:pt>
                 <c:pt idx="1">
-                  <c:v>755</c:v>
+                  <c:v>1333</c:v>
                 </c:pt>
                 <c:pt idx="2">
-                  <c:v>1427</c:v>
+                  <c:v>2541</c:v>
                 </c:pt>
                 <c:pt idx="3">
-                  <c:v>1887</c:v>
+                  <c:v>3371</c:v>
                 </c:pt>
               </c:numCache>
             </c:numRef>
@@ -371,16 +371,16 @@
                 <c:formatCode>General</c:formatCode>
                 <c:ptCount val="4"/>
                 <c:pt idx="0">
-                  <c:v>241</c:v>
+                  <c:v>410</c:v>
                 </c:pt>
                 <c:pt idx="1">
-                  <c:v>821</c:v>
+                  <c:v>1458</c:v>
                 </c:pt>
                 <c:pt idx="2">
-                  <c:v>1392</c:v>
+                  <c:v>2496</c:v>
                 </c:pt>
                 <c:pt idx="3">
-                  <c:v>1985</c:v>
+                  <c:v>3542</c:v>
                 </c:pt>
               </c:numCache>
             </c:numRef>
